--- a/ppt/1.Kafka 사전 지식 및 환경셋팅.pptx
+++ b/ppt/1.Kafka 사전 지식 및 환경셋팅.pptx
@@ -389,7 +389,7 @@
           <a:p>
             <a:fld id="{9A0C724B-EF17-47EB-896B-48FE094B37A9}" type="datetimeFigureOut">
               <a:rPr lang="ko-KR" altLang="en-US" smtClean="0"/>
-              <a:t>2026-08-11</a:t>
+              <a:t>2026-08-12</a:t>
             </a:fld>
             <a:endParaRPr lang="ko-KR" altLang="en-US"/>
           </a:p>
@@ -597,7 +597,7 @@
           <a:p>
             <a:fld id="{9A0C724B-EF17-47EB-896B-48FE094B37A9}" type="datetimeFigureOut">
               <a:rPr lang="ko-KR" altLang="en-US" smtClean="0"/>
-              <a:t>2026-08-11</a:t>
+              <a:t>2026-08-12</a:t>
             </a:fld>
             <a:endParaRPr lang="ko-KR" altLang="en-US"/>
           </a:p>
@@ -853,7 +853,7 @@
           <a:p>
             <a:fld id="{9A0C724B-EF17-47EB-896B-48FE094B37A9}" type="datetimeFigureOut">
               <a:rPr lang="ko-KR" altLang="en-US" smtClean="0"/>
-              <a:t>2026-08-11</a:t>
+              <a:t>2026-08-12</a:t>
             </a:fld>
             <a:endParaRPr lang="ko-KR" altLang="en-US"/>
           </a:p>
@@ -1027,7 +1027,7 @@
           <a:p>
             <a:fld id="{9A0C724B-EF17-47EB-896B-48FE094B37A9}" type="datetimeFigureOut">
               <a:rPr lang="ko-KR" altLang="en-US" smtClean="0"/>
-              <a:t>2026-08-11</a:t>
+              <a:t>2026-08-12</a:t>
             </a:fld>
             <a:endParaRPr lang="ko-KR" altLang="en-US"/>
           </a:p>
@@ -1370,7 +1370,7 @@
           <a:p>
             <a:fld id="{9A0C724B-EF17-47EB-896B-48FE094B37A9}" type="datetimeFigureOut">
               <a:rPr lang="ko-KR" altLang="en-US" smtClean="0"/>
-              <a:t>2026-08-11</a:t>
+              <a:t>2026-08-12</a:t>
             </a:fld>
             <a:endParaRPr lang="ko-KR" altLang="en-US"/>
           </a:p>
@@ -1645,7 +1645,7 @@
           <a:p>
             <a:fld id="{9A0C724B-EF17-47EB-896B-48FE094B37A9}" type="datetimeFigureOut">
               <a:rPr lang="ko-KR" altLang="en-US" smtClean="0"/>
-              <a:t>2026-08-11</a:t>
+              <a:t>2026-08-12</a:t>
             </a:fld>
             <a:endParaRPr lang="ko-KR" altLang="en-US"/>
           </a:p>
@@ -2024,7 +2024,7 @@
           <a:p>
             <a:fld id="{9A0C724B-EF17-47EB-896B-48FE094B37A9}" type="datetimeFigureOut">
               <a:rPr lang="ko-KR" altLang="en-US" smtClean="0"/>
-              <a:t>2026-08-11</a:t>
+              <a:t>2026-08-12</a:t>
             </a:fld>
             <a:endParaRPr lang="ko-KR" altLang="en-US"/>
           </a:p>
@@ -2142,7 +2142,7 @@
           <a:p>
             <a:fld id="{9A0C724B-EF17-47EB-896B-48FE094B37A9}" type="datetimeFigureOut">
               <a:rPr lang="ko-KR" altLang="en-US" smtClean="0"/>
-              <a:t>2026-08-11</a:t>
+              <a:t>2026-08-12</a:t>
             </a:fld>
             <a:endParaRPr lang="ko-KR" altLang="en-US"/>
           </a:p>
@@ -2313,7 +2313,7 @@
           <a:p>
             <a:fld id="{9A0C724B-EF17-47EB-896B-48FE094B37A9}" type="datetimeFigureOut">
               <a:rPr lang="ko-KR" altLang="en-US" smtClean="0"/>
-              <a:t>2026-08-11</a:t>
+              <a:t>2026-08-12</a:t>
             </a:fld>
             <a:endParaRPr lang="ko-KR" altLang="en-US"/>
           </a:p>
@@ -2667,7 +2667,7 @@
           <a:p>
             <a:fld id="{9A0C724B-EF17-47EB-896B-48FE094B37A9}" type="datetimeFigureOut">
               <a:rPr lang="ko-KR" altLang="en-US" smtClean="0"/>
-              <a:t>2026-08-11</a:t>
+              <a:t>2026-08-12</a:t>
             </a:fld>
             <a:endParaRPr lang="ko-KR" altLang="en-US"/>
           </a:p>
@@ -3049,7 +3049,7 @@
           <a:p>
             <a:fld id="{9A0C724B-EF17-47EB-896B-48FE094B37A9}" type="datetimeFigureOut">
               <a:rPr lang="ko-KR" altLang="en-US" smtClean="0"/>
-              <a:t>2026-08-11</a:t>
+              <a:t>2026-08-12</a:t>
             </a:fld>
             <a:endParaRPr lang="ko-KR" altLang="en-US"/>
           </a:p>
@@ -3336,7 +3336,7 @@
           <a:p>
             <a:fld id="{9A0C724B-EF17-47EB-896B-48FE094B37A9}" type="datetimeFigureOut">
               <a:rPr lang="ko-KR" altLang="en-US" smtClean="0"/>
-              <a:t>2026-08-11</a:t>
+              <a:t>2026-08-12</a:t>
             </a:fld>
             <a:endParaRPr lang="ko-KR" altLang="en-US"/>
           </a:p>
@@ -6044,7 +6044,7 @@
             </a:pPr>
             <a:r>
               <a:rPr lang="en-US" altLang="ko-KR" sz="1200"/>
-              <a:t>KAFKA_CLUSTER_ID="$(bin/kafka-storage.sh random-uuid)“</a:t>
+              <a:t>KAFKA_CLUSTER_ID="$(bin/kafka-storage.sh random-uuid)"</a:t>
             </a:r>
           </a:p>
           <a:p>
